--- a/~sasano/lecture/pn2/26/P09.pptx
+++ b/~sasano/lecture/pn2/26/P09.pptx
@@ -241,7 +241,7 @@
             <a:fld id="{69F51DE4-7453-4D78-ADD3-DB57E2765C77}" type="datetimeFigureOut">
               <a:rPr kumimoji="1" lang="ja-JP" altLang="en-US" smtClean="0"/>
               <a:pPr/>
-              <a:t>2025/11/25</a:t>
+              <a:t>2026/9/28</a:t>
             </a:fld>
             <a:endParaRPr kumimoji="1" lang="ja-JP" altLang="en-US"/>
           </a:p>
@@ -805,7 +805,7 @@
             <a:fld id="{E90ED720-0104-4369-84BC-D37694168613}" type="datetimeFigureOut">
               <a:rPr kumimoji="1" lang="ja-JP" altLang="en-US" smtClean="0"/>
               <a:pPr/>
-              <a:t>2025/11/25</a:t>
+              <a:t>2026/9/28</a:t>
             </a:fld>
             <a:endParaRPr kumimoji="1" lang="ja-JP" altLang="en-US"/>
           </a:p>
@@ -1002,7 +1002,7 @@
             <a:fld id="{E90ED720-0104-4369-84BC-D37694168613}" type="datetimeFigureOut">
               <a:rPr kumimoji="1" lang="ja-JP" altLang="en-US" smtClean="0"/>
               <a:pPr/>
-              <a:t>2025/11/25</a:t>
+              <a:t>2026/9/28</a:t>
             </a:fld>
             <a:endParaRPr kumimoji="1" lang="ja-JP" altLang="en-US"/>
           </a:p>
@@ -1209,7 +1209,7 @@
             <a:fld id="{E90ED720-0104-4369-84BC-D37694168613}" type="datetimeFigureOut">
               <a:rPr kumimoji="1" lang="ja-JP" altLang="en-US" smtClean="0"/>
               <a:pPr/>
-              <a:t>2025/11/25</a:t>
+              <a:t>2026/9/28</a:t>
             </a:fld>
             <a:endParaRPr kumimoji="1" lang="ja-JP" altLang="en-US"/>
           </a:p>
@@ -1788,7 +1788,7 @@
             <a:fld id="{E90ED720-0104-4369-84BC-D37694168613}" type="datetimeFigureOut">
               <a:rPr kumimoji="1" lang="ja-JP" altLang="en-US" smtClean="0"/>
               <a:pPr/>
-              <a:t>2025/11/25</a:t>
+              <a:t>2026/9/28</a:t>
             </a:fld>
             <a:endParaRPr kumimoji="1" lang="ja-JP" altLang="en-US"/>
           </a:p>
@@ -2030,7 +2030,7 @@
             <a:fld id="{E90ED720-0104-4369-84BC-D37694168613}" type="datetimeFigureOut">
               <a:rPr kumimoji="1" lang="ja-JP" altLang="en-US" smtClean="0"/>
               <a:pPr/>
-              <a:t>2025/11/25</a:t>
+              <a:t>2026/9/28</a:t>
             </a:fld>
             <a:endParaRPr kumimoji="1" lang="ja-JP" altLang="en-US"/>
           </a:p>
@@ -2376,7 +2376,7 @@
             <a:fld id="{E90ED720-0104-4369-84BC-D37694168613}" type="datetimeFigureOut">
               <a:rPr kumimoji="1" lang="ja-JP" altLang="en-US" smtClean="0"/>
               <a:pPr/>
-              <a:t>2025/11/25</a:t>
+              <a:t>2026/9/28</a:t>
             </a:fld>
             <a:endParaRPr kumimoji="1" lang="ja-JP" altLang="en-US"/>
           </a:p>
@@ -2856,7 +2856,7 @@
             <a:fld id="{E90ED720-0104-4369-84BC-D37694168613}" type="datetimeFigureOut">
               <a:rPr kumimoji="1" lang="ja-JP" altLang="en-US" smtClean="0"/>
               <a:pPr/>
-              <a:t>2025/11/25</a:t>
+              <a:t>2026/9/28</a:t>
             </a:fld>
             <a:endParaRPr kumimoji="1" lang="ja-JP" altLang="en-US"/>
           </a:p>
@@ -2970,7 +2970,7 @@
             <a:fld id="{E90ED720-0104-4369-84BC-D37694168613}" type="datetimeFigureOut">
               <a:rPr kumimoji="1" lang="ja-JP" altLang="en-US" smtClean="0"/>
               <a:pPr/>
-              <a:t>2025/11/25</a:t>
+              <a:t>2026/9/28</a:t>
             </a:fld>
             <a:endParaRPr kumimoji="1" lang="ja-JP" altLang="en-US"/>
           </a:p>
@@ -3062,7 +3062,7 @@
             <a:fld id="{E90ED720-0104-4369-84BC-D37694168613}" type="datetimeFigureOut">
               <a:rPr kumimoji="1" lang="ja-JP" altLang="en-US" smtClean="0"/>
               <a:pPr/>
-              <a:t>2025/11/25</a:t>
+              <a:t>2026/9/28</a:t>
             </a:fld>
             <a:endParaRPr kumimoji="1" lang="ja-JP" altLang="en-US"/>
           </a:p>
@@ -3366,7 +3366,7 @@
             <a:fld id="{E90ED720-0104-4369-84BC-D37694168613}" type="datetimeFigureOut">
               <a:rPr kumimoji="1" lang="ja-JP" altLang="en-US" smtClean="0"/>
               <a:pPr/>
-              <a:t>2025/11/25</a:t>
+              <a:t>2026/9/28</a:t>
             </a:fld>
             <a:endParaRPr kumimoji="1" lang="ja-JP" altLang="en-US"/>
           </a:p>
@@ -3615,7 +3615,7 @@
             <a:fld id="{E90ED720-0104-4369-84BC-D37694168613}" type="datetimeFigureOut">
               <a:rPr kumimoji="1" lang="ja-JP" altLang="en-US" smtClean="0"/>
               <a:pPr/>
-              <a:t>2025/11/25</a:t>
+              <a:t>2026/9/28</a:t>
             </a:fld>
             <a:endParaRPr kumimoji="1" lang="ja-JP" altLang="en-US"/>
           </a:p>
@@ -3855,7 +3855,7 @@
             <a:fld id="{E90ED720-0104-4369-84BC-D37694168613}" type="datetimeFigureOut">
               <a:rPr kumimoji="1" lang="ja-JP" altLang="en-US" smtClean="0"/>
               <a:pPr/>
-              <a:t>2025/11/25</a:t>
+              <a:t>2026/9/28</a:t>
             </a:fld>
             <a:endParaRPr kumimoji="1" lang="ja-JP" altLang="en-US"/>
           </a:p>
@@ -4267,8 +4267,8 @@
         </p:nvSpPr>
         <p:spPr>
           <a:xfrm>
-            <a:off x="2928926" y="4857760"/>
-            <a:ext cx="3534942" cy="523220"/>
+            <a:off x="3821634" y="5040640"/>
+            <a:ext cx="1500732" cy="523220"/>
           </a:xfrm>
           <a:prstGeom prst="rect">
             <a:avLst/>
@@ -4281,9 +4281,14 @@
           </a:bodyPr>
           <a:lstStyle/>
           <a:p>
+            <a:pPr algn="ctr"/>
+            <a:r>
+              <a:rPr kumimoji="1" lang="ja-JP" altLang="en-US" sz="2800"/>
+              <a:t>篠埜　</a:t>
+            </a:r>
             <a:r>
               <a:rPr kumimoji="1" lang="ja-JP" altLang="en-US" sz="2800" dirty="0"/>
-              <a:t>情報工学科　篠埜　功</a:t>
+              <a:t>功</a:t>
             </a:r>
           </a:p>
         </p:txBody>
@@ -13082,7 +13087,7 @@
                         <a:noFill/>
                         <a:extLst>
                           <a:ext uri="{909E8E84-426E-40dd-AFC4-6F175D3DCCD1}">
-                            <a14:hiddenFill xmlns="" xmlns:a14="http://schemas.microsoft.com/office/drawing/2010/main">
+                            <a14:hiddenFill xmlns:a14="http://schemas.microsoft.com/office/drawing/2010/main" xmlns="">
                               <a:solidFill>
                                 <a:srgbClr val="FFFFFF"/>
                               </a:solidFill>
@@ -13332,7 +13337,7 @@
                         <a:noFill/>
                         <a:extLst>
                           <a:ext uri="{909E8E84-426E-40dd-AFC4-6F175D3DCCD1}">
-                            <a14:hiddenFill xmlns="" xmlns:a14="http://schemas.microsoft.com/office/drawing/2010/main">
+                            <a14:hiddenFill xmlns:a14="http://schemas.microsoft.com/office/drawing/2010/main" xmlns="">
                               <a:solidFill>
                                 <a:srgbClr val="FFFFFF"/>
                               </a:solidFill>
@@ -13734,7 +13739,7 @@
                       <a:noFill/>
                       <a:extLst>
                         <a:ext uri="{909E8E84-426E-40dd-AFC4-6F175D3DCCD1}">
-                          <a14:hiddenFill xmlns="" xmlns:a14="http://schemas.microsoft.com/office/drawing/2010/main">
+                          <a14:hiddenFill xmlns:a14="http://schemas.microsoft.com/office/drawing/2010/main" xmlns="">
                             <a:solidFill>
                               <a:srgbClr val="FFFFFF"/>
                             </a:solidFill>
@@ -13864,7 +13869,7 @@
                       <a:noFill/>
                       <a:extLst>
                         <a:ext uri="{909E8E84-426E-40dd-AFC4-6F175D3DCCD1}">
-                          <a14:hiddenFill xmlns="" xmlns:a14="http://schemas.microsoft.com/office/drawing/2010/main">
+                          <a14:hiddenFill xmlns:a14="http://schemas.microsoft.com/office/drawing/2010/main" xmlns="">
                             <a:solidFill>
                               <a:srgbClr val="FFFFFF"/>
                             </a:solidFill>
